--- a/For DBA/3. Управление состоянием СУБД/Postgresql управление состоянием СУБД.pptx
+++ b/For DBA/3. Управление состоянием СУБД/Postgresql управление состоянием СУБД.pptx
@@ -300,7 +300,7 @@
           <a:p>
             <a:fld id="{B4C71EC6-210F-42DE-9C53-41977AD35B3D}" type="datetimeFigureOut">
               <a:rPr lang="ru-RU" smtClean="0"/>
-              <a:t>06.09.2026</a:t>
+              <a:t>17.10.2026</a:t>
             </a:fld>
             <a:endParaRPr lang="ru-RU"/>
           </a:p>
@@ -465,7 +465,7 @@
           <a:p>
             <a:fld id="{B4C71EC6-210F-42DE-9C53-41977AD35B3D}" type="datetimeFigureOut">
               <a:rPr lang="ru-RU" smtClean="0"/>
-              <a:t>06.09.2026</a:t>
+              <a:t>17.10.2026</a:t>
             </a:fld>
             <a:endParaRPr lang="ru-RU"/>
           </a:p>
@@ -640,7 +640,7 @@
           <a:p>
             <a:fld id="{B4C71EC6-210F-42DE-9C53-41977AD35B3D}" type="datetimeFigureOut">
               <a:rPr lang="ru-RU" smtClean="0"/>
-              <a:t>06.09.2026</a:t>
+              <a:t>17.10.2026</a:t>
             </a:fld>
             <a:endParaRPr lang="ru-RU"/>
           </a:p>
@@ -805,7 +805,7 @@
           <a:p>
             <a:fld id="{B4C71EC6-210F-42DE-9C53-41977AD35B3D}" type="datetimeFigureOut">
               <a:rPr lang="ru-RU" smtClean="0"/>
-              <a:t>06.09.2026</a:t>
+              <a:t>17.10.2026</a:t>
             </a:fld>
             <a:endParaRPr lang="ru-RU"/>
           </a:p>
@@ -1046,7 +1046,7 @@
           <a:p>
             <a:fld id="{B4C71EC6-210F-42DE-9C53-41977AD35B3D}" type="datetimeFigureOut">
               <a:rPr lang="ru-RU" smtClean="0"/>
-              <a:t>06.09.2026</a:t>
+              <a:t>17.10.2026</a:t>
             </a:fld>
             <a:endParaRPr lang="ru-RU"/>
           </a:p>
@@ -1329,7 +1329,7 @@
           <a:p>
             <a:fld id="{B4C71EC6-210F-42DE-9C53-41977AD35B3D}" type="datetimeFigureOut">
               <a:rPr lang="ru-RU" smtClean="0"/>
-              <a:t>06.09.2026</a:t>
+              <a:t>17.10.2026</a:t>
             </a:fld>
             <a:endParaRPr lang="ru-RU"/>
           </a:p>
@@ -1746,7 +1746,7 @@
           <a:p>
             <a:fld id="{B4C71EC6-210F-42DE-9C53-41977AD35B3D}" type="datetimeFigureOut">
               <a:rPr lang="ru-RU" smtClean="0"/>
-              <a:t>06.09.2026</a:t>
+              <a:t>17.10.2026</a:t>
             </a:fld>
             <a:endParaRPr lang="ru-RU"/>
           </a:p>
@@ -1859,7 +1859,7 @@
           <a:p>
             <a:fld id="{B4C71EC6-210F-42DE-9C53-41977AD35B3D}" type="datetimeFigureOut">
               <a:rPr lang="ru-RU" smtClean="0"/>
-              <a:t>06.09.2026</a:t>
+              <a:t>17.10.2026</a:t>
             </a:fld>
             <a:endParaRPr lang="ru-RU"/>
           </a:p>
@@ -1949,7 +1949,7 @@
           <a:p>
             <a:fld id="{B4C71EC6-210F-42DE-9C53-41977AD35B3D}" type="datetimeFigureOut">
               <a:rPr lang="ru-RU" smtClean="0"/>
-              <a:t>06.09.2026</a:t>
+              <a:t>17.10.2026</a:t>
             </a:fld>
             <a:endParaRPr lang="ru-RU"/>
           </a:p>
@@ -2221,7 +2221,7 @@
           <a:p>
             <a:fld id="{B4C71EC6-210F-42DE-9C53-41977AD35B3D}" type="datetimeFigureOut">
               <a:rPr lang="ru-RU" smtClean="0"/>
-              <a:t>06.09.2026</a:t>
+              <a:t>17.10.2026</a:t>
             </a:fld>
             <a:endParaRPr lang="ru-RU"/>
           </a:p>
@@ -2469,7 +2469,7 @@
           <a:p>
             <a:fld id="{B4C71EC6-210F-42DE-9C53-41977AD35B3D}" type="datetimeFigureOut">
               <a:rPr lang="ru-RU" smtClean="0"/>
-              <a:t>06.09.2026</a:t>
+              <a:t>17.10.2026</a:t>
             </a:fld>
             <a:endParaRPr lang="ru-RU"/>
           </a:p>
@@ -2677,7 +2677,7 @@
           <a:p>
             <a:fld id="{B4C71EC6-210F-42DE-9C53-41977AD35B3D}" type="datetimeFigureOut">
               <a:rPr lang="ru-RU" smtClean="0"/>
-              <a:t>06.09.2026</a:t>
+              <a:t>17.10.2026</a:t>
             </a:fld>
             <a:endParaRPr lang="ru-RU"/>
           </a:p>
@@ -3063,18 +3063,50 @@
           <a:lstStyle/>
           <a:p>
             <a:r>
-              <a:rPr lang="en-US" dirty="0" err="1" smtClean="0"/>
+              <a:rPr lang="en-US" dirty="0" err="1" smtClean="0">
+                <a:effectLst>
+                  <a:outerShdw blurRad="38100" dist="38100" dir="2700000" algn="tl">
+                    <a:srgbClr val="000000">
+                      <a:alpha val="43137"/>
+                    </a:srgbClr>
+                  </a:outerShdw>
+                </a:effectLst>
+              </a:rPr>
               <a:t>Postgresql</a:t>
             </a:r>
             <a:r>
-              <a:rPr lang="en-US" dirty="0" smtClean="0"/>
+              <a:rPr lang="en-US" dirty="0" smtClean="0">
+                <a:effectLst>
+                  <a:outerShdw blurRad="38100" dist="38100" dir="2700000" algn="tl">
+                    <a:srgbClr val="000000">
+                      <a:alpha val="43137"/>
+                    </a:srgbClr>
+                  </a:outerShdw>
+                </a:effectLst>
+              </a:rPr>
               <a:t> </a:t>
             </a:r>
             <a:r>
-              <a:rPr lang="ru-RU" dirty="0" smtClean="0"/>
+              <a:rPr lang="ru-RU" dirty="0" smtClean="0">
+                <a:effectLst>
+                  <a:outerShdw blurRad="38100" dist="38100" dir="2700000" algn="tl">
+                    <a:srgbClr val="000000">
+                      <a:alpha val="43137"/>
+                    </a:srgbClr>
+                  </a:outerShdw>
+                </a:effectLst>
+              </a:rPr>
               <a:t>управление состоянием СУБД</a:t>
             </a:r>
-            <a:endParaRPr lang="ru-RU" dirty="0"/>
+            <a:endParaRPr lang="ru-RU" dirty="0">
+              <a:effectLst>
+                <a:outerShdw blurRad="38100" dist="38100" dir="2700000" algn="tl">
+                  <a:srgbClr val="000000">
+                    <a:alpha val="43137"/>
+                  </a:srgbClr>
+                </a:outerShdw>
+              </a:effectLst>
+            </a:endParaRPr>
           </a:p>
         </p:txBody>
       </p:sp>
@@ -3401,7 +3433,7 @@
         </p:blipFill>
         <p:spPr>
           <a:xfrm>
-            <a:off x="683568" y="1700807"/>
+            <a:off x="683568" y="1559187"/>
             <a:ext cx="7702744" cy="5254189"/>
           </a:xfrm>
         </p:spPr>
@@ -3453,7 +3485,12 @@
             <p:ph type="title"/>
           </p:nvPr>
         </p:nvSpPr>
-        <p:spPr/>
+        <p:spPr>
+          <a:xfrm>
+            <a:off x="0" y="44624"/>
+            <a:ext cx="9036496" cy="1143000"/>
+          </a:xfrm>
+        </p:spPr>
         <p:txBody>
           <a:bodyPr>
             <a:normAutofit fontScale="90000"/>
@@ -3520,7 +3557,7 @@
         </p:blipFill>
         <p:spPr>
           <a:xfrm>
-            <a:off x="1979712" y="1340768"/>
+            <a:off x="1979712" y="1120557"/>
             <a:ext cx="5544616" cy="5766787"/>
           </a:xfrm>
         </p:spPr>
@@ -3572,7 +3609,12 @@
             <p:ph type="title"/>
           </p:nvPr>
         </p:nvSpPr>
-        <p:spPr/>
+        <p:spPr>
+          <a:xfrm>
+            <a:off x="0" y="44624"/>
+            <a:ext cx="9144000" cy="1143000"/>
+          </a:xfrm>
+        </p:spPr>
         <p:txBody>
           <a:bodyPr>
             <a:normAutofit fontScale="90000"/>
@@ -3592,18 +3634,6 @@
               <a:t>Момент </a:t>
             </a:r>
             <a:r>
-              <a:rPr lang="ru-RU" dirty="0" err="1" smtClean="0">
-                <a:effectLst>
-                  <a:outerShdw blurRad="38100" dist="38100" dir="2700000" algn="tl">
-                    <a:srgbClr val="000000">
-                      <a:alpha val="43137"/>
-                    </a:srgbClr>
-                  </a:outerShdw>
-                </a:effectLst>
-              </a:rPr>
-              <a:t>отменя</a:t>
-            </a:r>
-            <a:r>
               <a:rPr lang="ru-RU" dirty="0" smtClean="0">
                 <a:effectLst>
                   <a:outerShdw blurRad="38100" dist="38100" dir="2700000" algn="tl">
@@ -3613,7 +3643,43 @@
                   </a:outerShdw>
                 </a:effectLst>
               </a:rPr>
-              <a:t> команды </a:t>
+              <a:t>отмен</a:t>
+            </a:r>
+            <a:r>
+              <a:rPr lang="ru-RU" dirty="0">
+                <a:effectLst>
+                  <a:outerShdw blurRad="38100" dist="38100" dir="2700000" algn="tl">
+                    <a:srgbClr val="000000">
+                      <a:alpha val="43137"/>
+                    </a:srgbClr>
+                  </a:outerShdw>
+                </a:effectLst>
+              </a:rPr>
+              <a:t>ы</a:t>
+            </a:r>
+            <a:r>
+              <a:rPr lang="ru-RU" dirty="0" smtClean="0">
+                <a:effectLst>
+                  <a:outerShdw blurRad="38100" dist="38100" dir="2700000" algn="tl">
+                    <a:srgbClr val="000000">
+                      <a:alpha val="43137"/>
+                    </a:srgbClr>
+                  </a:outerShdw>
+                </a:effectLst>
+              </a:rPr>
+              <a:t> </a:t>
+            </a:r>
+            <a:r>
+              <a:rPr lang="ru-RU" dirty="0" smtClean="0">
+                <a:effectLst>
+                  <a:outerShdw blurRad="38100" dist="38100" dir="2700000" algn="tl">
+                    <a:srgbClr val="000000">
+                      <a:alpha val="43137"/>
+                    </a:srgbClr>
+                  </a:outerShdw>
+                </a:effectLst>
+              </a:rPr>
+              <a:t>команды </a:t>
             </a:r>
             <a:r>
               <a:rPr lang="ru-RU" dirty="0">
@@ -3667,7 +3733,7 @@
         </p:blipFill>
         <p:spPr>
           <a:xfrm>
-            <a:off x="1763688" y="1340768"/>
+            <a:off x="1763688" y="1196752"/>
             <a:ext cx="5904314" cy="5537987"/>
           </a:xfrm>
         </p:spPr>
@@ -4156,12 +4222,12 @@
           <a:graphicData uri="http://schemas.openxmlformats.org/presentationml/2006/ole">
             <mc:AlternateContent xmlns:mc="http://schemas.openxmlformats.org/markup-compatibility/2006">
               <mc:Choice xmlns:v="urn:schemas-microsoft-com:vml" Requires="v">
-                <p:oleObj spid="_x0000_s1028" name="Лист" r:id="rId3" imgW="11330905" imgH="7231388" progId="Excel.Sheet.12">
+                <p:oleObj spid="_x0000_s1029" name="Лист" r:id="rId4" imgW="11330905" imgH="7231388" progId="Excel.Sheet.12">
                   <p:embed/>
                 </p:oleObj>
               </mc:Choice>
               <mc:Fallback>
-                <p:oleObj name="Лист" r:id="rId3" imgW="11330905" imgH="7231388" progId="Excel.Sheet.12">
+                <p:oleObj name="Лист" r:id="rId4" imgW="11330905" imgH="7231388" progId="Excel.Sheet.12">
                   <p:embed/>
                   <p:pic>
                     <p:nvPicPr>
@@ -4170,7 +4236,7 @@
                       <p:nvPr/>
                     </p:nvPicPr>
                     <p:blipFill>
-                      <a:blip r:embed="rId4"/>
+                      <a:blip r:embed="rId5"/>
                       <a:stretch>
                         <a:fillRect/>
                       </a:stretch>
@@ -4433,7 +4499,6 @@
               <a:rPr lang="ru-RU" dirty="0"/>
               <a:t>Действие: Мы временно увеличиваем память для операций сортировки и хеширования.</a:t>
             </a:r>
-            <a:endParaRPr lang="ru-RU" dirty="0"/>
           </a:p>
         </p:txBody>
       </p:sp>
@@ -4501,19 +4566,7 @@
                   </a:outerShdw>
                 </a:effectLst>
               </a:rPr>
-              <a:t>Команда </a:t>
-            </a:r>
-            <a:r>
-              <a:rPr lang="ru-RU" dirty="0" smtClean="0">
-                <a:effectLst>
-                  <a:outerShdw blurRad="38100" dist="38100" dir="2700000" algn="tl">
-                    <a:srgbClr val="000000">
-                      <a:alpha val="43137"/>
-                    </a:srgbClr>
-                  </a:outerShdw>
-                </a:effectLst>
-              </a:rPr>
-              <a:t>вывода </a:t>
+              <a:t>Команда вывода </a:t>
             </a:r>
             <a:r>
               <a:rPr lang="ru-RU" dirty="0">
@@ -4551,15 +4604,6 @@
               </a:rPr>
               <a:t>уровня SIGHUP </a:t>
             </a:r>
-            <a:endParaRPr lang="ru-RU" dirty="0">
-              <a:effectLst>
-                <a:outerShdw blurRad="38100" dist="38100" dir="2700000" algn="tl">
-                  <a:srgbClr val="000000">
-                    <a:alpha val="43137"/>
-                  </a:srgbClr>
-                </a:outerShdw>
-              </a:effectLst>
-            </a:endParaRPr>
           </a:p>
         </p:txBody>
       </p:sp>
@@ -4979,12 +5023,8 @@
               <a:t>Еще раз обращаю внимание на </a:t>
             </a:r>
             <a:r>
-              <a:rPr lang="ru-RU" dirty="0" err="1" smtClean="0"/>
-              <a:t>ствои</a:t>
-            </a:r>
-            <a:r>
-              <a:rPr lang="ru-RU" dirty="0"/>
-              <a:t> </a:t>
+              <a:rPr lang="ru-RU" dirty="0" smtClean="0"/>
+              <a:t>свои </a:t>
             </a:r>
             <a:r>
               <a:rPr lang="ru-RU" dirty="0" smtClean="0"/>
